--- a/public/manuales/Capacitacion_Usuario.pptx
+++ b/public/manuales/Capacitacion_Usuario.pptx
@@ -3363,7 +3363,7 @@
                 </a:solidFill>
                 <a:latin typeface="Calibri"/>
               </a:rPr>
-              <a:t>Condominio Laguna Norte  ·  Junio 2026</a:t>
+              <a:t>Condominio Laguna Norte  ·  Junio 2026  ·  v1.1</a:t>
             </a:r>
           </a:p>
         </p:txBody>
@@ -3748,7 +3748,7 @@
                 </a:solidFill>
                 <a:latin typeface="Calibri"/>
               </a:rPr>
-              <a:t>Como Usuario tienes acceso básico al sistema. Puedes crear OT y Solicitudes de Compra.</a:t>
+              <a:t>Como Usuario tienes acceso básico al sistema.</a:t>
             </a:r>
           </a:p>
         </p:txBody>
@@ -3788,7 +3788,6 @@
                 <a:solidFill>
                   <a:srgbClr val="16A34A"/>
                 </a:solidFill>
-                <a:latin typeface="Calibri"/>
               </a:rPr>
               <a:t>● </a:t>
             </a:r>
@@ -3797,7 +3796,6 @@
                 <a:solidFill>
                   <a:srgbClr val="0F2040"/>
                 </a:solidFill>
-                <a:latin typeface="Calibri"/>
               </a:rPr>
               <a:t>Crear Órdenes de Trabajo (no editar ni eliminar)</a:t>
             </a:r>
@@ -3816,7 +3814,6 @@
                 <a:solidFill>
                   <a:srgbClr val="16A34A"/>
                 </a:solidFill>
-                <a:latin typeface="Calibri"/>
               </a:rPr>
               <a:t>● </a:t>
             </a:r>
@@ -3825,7 +3822,6 @@
                 <a:solidFill>
                   <a:srgbClr val="0F2040"/>
                 </a:solidFill>
-                <a:latin typeface="Calibri"/>
               </a:rPr>
               <a:t>Crear Solicitudes de Compra (con justificación)</a:t>
             </a:r>
@@ -3844,7 +3840,6 @@
                 <a:solidFill>
                   <a:srgbClr val="16A34A"/>
                 </a:solidFill>
-                <a:latin typeface="Calibri"/>
               </a:rPr>
               <a:t>● </a:t>
             </a:r>
@@ -3853,7 +3848,6 @@
                 <a:solidFill>
                   <a:srgbClr val="0F2040"/>
                 </a:solidFill>
-                <a:latin typeface="Calibri"/>
               </a:rPr>
               <a:t>Ver catálogos (materiales, tareas, herramientas)</a:t>
             </a:r>
@@ -3872,7 +3866,6 @@
                 <a:solidFill>
                   <a:srgbClr val="16A34A"/>
                 </a:solidFill>
-                <a:latin typeface="Calibri"/>
               </a:rPr>
               <a:t>● </a:t>
             </a:r>
@@ -3881,7 +3874,6 @@
                 <a:solidFill>
                   <a:srgbClr val="0F2040"/>
                 </a:solidFill>
-                <a:latin typeface="Calibri"/>
               </a:rPr>
               <a:t>Ver reportes (no exportar)</a:t>
             </a:r>
@@ -3900,7 +3892,6 @@
                 <a:solidFill>
                   <a:srgbClr val="16A34A"/>
                 </a:solidFill>
-                <a:latin typeface="Calibri"/>
               </a:rPr>
               <a:t>● </a:t>
             </a:r>
@@ -3909,7 +3900,6 @@
                 <a:solidFill>
                   <a:srgbClr val="0F2040"/>
                 </a:solidFill>
-                <a:latin typeface="Calibri"/>
               </a:rPr>
               <a:t>Ver inventario</a:t>
             </a:r>
@@ -3928,7 +3918,6 @@
                 <a:solidFill>
                   <a:srgbClr val="16A34A"/>
                 </a:solidFill>
-                <a:latin typeface="Calibri"/>
               </a:rPr>
               <a:t>● </a:t>
             </a:r>
@@ -3937,7 +3926,6 @@
                 <a:solidFill>
                   <a:srgbClr val="0F2040"/>
                 </a:solidFill>
-                <a:latin typeface="Calibri"/>
               </a:rPr>
               <a:t>Hacer seguimiento de tus solicitudes</a:t>
             </a:r>
@@ -4158,7 +4146,7 @@
                 </a:solidFill>
                 <a:latin typeface="Calibri"/>
               </a:rPr>
-              <a:t>Módulos que puedes ver</a:t>
+              <a:t>Dashboard del Usuario</a:t>
             </a:r>
           </a:p>
         </p:txBody>
@@ -4198,16 +4186,40 @@
           </a:p>
         </p:txBody>
       </p:sp>
-      <p:sp>
-        <p:nvSpPr>
-          <p:cNvPr id="5" name="TextBox 4"/>
+      <p:pic>
+        <p:nvPicPr>
+          <p:cNvPr id="5" name="Picture 4" descr="02_dashboard.png"/>
+          <p:cNvPicPr>
+            <a:picLocks noChangeAspect="1"/>
+          </p:cNvPicPr>
+          <p:nvPr/>
+        </p:nvPicPr>
+        <p:blipFill>
+          <a:blip r:embed="rId2"/>
+          <a:stretch>
+            <a:fillRect/>
+          </a:stretch>
+        </p:blipFill>
+        <p:spPr>
+          <a:xfrm>
+            <a:off x="1386687" y="1097280"/>
+            <a:ext cx="9418320" cy="5886450"/>
+          </a:xfrm>
+          <a:prstGeom prst="rect">
+            <a:avLst/>
+          </a:prstGeom>
+        </p:spPr>
+      </p:pic>
+      <p:sp>
+        <p:nvSpPr>
+          <p:cNvPr id="6" name="TextBox 5"/>
           <p:cNvSpPr txBox="1"/>
           <p:nvPr/>
         </p:nvSpPr>
         <p:spPr>
           <a:xfrm>
-            <a:off x="457200" y="1005840"/>
-            <a:ext cx="11247120" cy="731520"/>
+            <a:off x="914400" y="6035040"/>
+            <a:ext cx="10332720" cy="457200"/>
           </a:xfrm>
           <a:prstGeom prst="rect">
             <a:avLst/>
@@ -4215,295 +4227,20 @@
           <a:noFill/>
         </p:spPr>
         <p:txBody>
-          <a:bodyPr wrap="square" anchor="t" lIns="45720" rIns="45720">
+          <a:bodyPr wrap="square" anchor="ctr" lIns="45720" rIns="45720">
             <a:spAutoFit/>
           </a:bodyPr>
           <a:lstStyle/>
           <a:p>
-            <a:pPr algn="l"/>
-            <a:r>
-              <a:rPr sz="1400" b="0">
+            <a:pPr algn="ctr"/>
+            <a:r>
+              <a:rPr sz="1200" b="0">
                 <a:solidFill>
                   <a:srgbClr val="666666"/>
                 </a:solidFill>
                 <a:latin typeface="Calibri"/>
               </a:rPr>
-              <a:t>Acceso limitado a módulos esenciales:</a:t>
-            </a:r>
-          </a:p>
-        </p:txBody>
-      </p:sp>
-      <p:sp>
-        <p:nvSpPr>
-          <p:cNvPr id="6" name="TextBox 5"/>
-          <p:cNvSpPr txBox="1"/>
-          <p:nvPr/>
-        </p:nvSpPr>
-        <p:spPr>
-          <a:xfrm>
-            <a:off x="640080" y="1828800"/>
-            <a:ext cx="10972800" cy="4572000"/>
-          </a:xfrm>
-          <a:prstGeom prst="rect">
-            <a:avLst/>
-          </a:prstGeom>
-          <a:noFill/>
-        </p:spPr>
-        <p:txBody>
-          <a:bodyPr wrap="square">
-            <a:spAutoFit/>
-          </a:bodyPr>
-          <a:lstStyle/>
-          <a:p>
-            <a:pPr algn="l">
-              <a:lnSpc>
-                <a:spcPct val="140000"/>
-              </a:lnSpc>
-              <a:spcAft>
-                <a:spcPts val="800"/>
-              </a:spcAft>
-            </a:pPr>
-            <a:r>
-              <a:rPr sz="1600" b="1">
-                <a:solidFill>
-                  <a:srgbClr val="16A34A"/>
-                </a:solidFill>
-                <a:latin typeface="Calibri"/>
-              </a:rPr>
-              <a:t>● </a:t>
-            </a:r>
-            <a:r>
-              <a:rPr sz="1600">
-                <a:solidFill>
-                  <a:srgbClr val="0F2040"/>
-                </a:solidFill>
-                <a:latin typeface="Calibri"/>
-              </a:rPr>
-              <a:t>Dashboard</a:t>
-            </a:r>
-          </a:p>
-          <a:p>
-            <a:pPr algn="l">
-              <a:lnSpc>
-                <a:spcPct val="140000"/>
-              </a:lnSpc>
-              <a:spcAft>
-                <a:spcPts val="800"/>
-              </a:spcAft>
-            </a:pPr>
-            <a:r>
-              <a:rPr sz="1600" b="1">
-                <a:solidFill>
-                  <a:srgbClr val="16A34A"/>
-                </a:solidFill>
-                <a:latin typeface="Calibri"/>
-              </a:rPr>
-              <a:t>● </a:t>
-            </a:r>
-            <a:r>
-              <a:rPr sz="1600">
-                <a:solidFill>
-                  <a:srgbClr val="0F2040"/>
-                </a:solidFill>
-                <a:latin typeface="Calibri"/>
-              </a:rPr>
-              <a:t>Órdenes de Trabajo (ver + crear)</a:t>
-            </a:r>
-          </a:p>
-          <a:p>
-            <a:pPr algn="l">
-              <a:lnSpc>
-                <a:spcPct val="140000"/>
-              </a:lnSpc>
-              <a:spcAft>
-                <a:spcPts val="800"/>
-              </a:spcAft>
-            </a:pPr>
-            <a:r>
-              <a:rPr sz="1600" b="1">
-                <a:solidFill>
-                  <a:srgbClr val="16A34A"/>
-                </a:solidFill>
-                <a:latin typeface="Calibri"/>
-              </a:rPr>
-              <a:t>● </a:t>
-            </a:r>
-            <a:r>
-              <a:rPr sz="1600">
-                <a:solidFill>
-                  <a:srgbClr val="0F2040"/>
-                </a:solidFill>
-                <a:latin typeface="Calibri"/>
-              </a:rPr>
-              <a:t>Inspecciones (ver)</a:t>
-            </a:r>
-          </a:p>
-          <a:p>
-            <a:pPr algn="l">
-              <a:lnSpc>
-                <a:spcPct val="140000"/>
-              </a:lnSpc>
-              <a:spcAft>
-                <a:spcPts val="800"/>
-              </a:spcAft>
-            </a:pPr>
-            <a:r>
-              <a:rPr sz="1600" b="1">
-                <a:solidFill>
-                  <a:srgbClr val="16A34A"/>
-                </a:solidFill>
-                <a:latin typeface="Calibri"/>
-              </a:rPr>
-              <a:t>● </a:t>
-            </a:r>
-            <a:r>
-              <a:rPr sz="1600">
-                <a:solidFill>
-                  <a:srgbClr val="0F2040"/>
-                </a:solidFill>
-                <a:latin typeface="Calibri"/>
-              </a:rPr>
-              <a:t>Activos (ver)</a:t>
-            </a:r>
-          </a:p>
-          <a:p>
-            <a:pPr algn="l">
-              <a:lnSpc>
-                <a:spcPct val="140000"/>
-              </a:lnSpc>
-              <a:spcAft>
-                <a:spcPts val="800"/>
-              </a:spcAft>
-            </a:pPr>
-            <a:r>
-              <a:rPr sz="1600" b="1">
-                <a:solidFill>
-                  <a:srgbClr val="16A34A"/>
-                </a:solidFill>
-                <a:latin typeface="Calibri"/>
-              </a:rPr>
-              <a:t>● </a:t>
-            </a:r>
-            <a:r>
-              <a:rPr sz="1600">
-                <a:solidFill>
-                  <a:srgbClr val="0F2040"/>
-                </a:solidFill>
-                <a:latin typeface="Calibri"/>
-              </a:rPr>
-              <a:t>Catálogos: Materiales, Tareas, Herramientas (ver)</a:t>
-            </a:r>
-          </a:p>
-          <a:p>
-            <a:pPr algn="l">
-              <a:lnSpc>
-                <a:spcPct val="140000"/>
-              </a:lnSpc>
-              <a:spcAft>
-                <a:spcPts val="800"/>
-              </a:spcAft>
-            </a:pPr>
-            <a:r>
-              <a:rPr sz="1600" b="1">
-                <a:solidFill>
-                  <a:srgbClr val="16A34A"/>
-                </a:solidFill>
-                <a:latin typeface="Calibri"/>
-              </a:rPr>
-              <a:t>● </a:t>
-            </a:r>
-            <a:r>
-              <a:rPr sz="1600">
-                <a:solidFill>
-                  <a:srgbClr val="0F2040"/>
-                </a:solidFill>
-                <a:latin typeface="Calibri"/>
-              </a:rPr>
-              <a:t>Inventario (ver)</a:t>
-            </a:r>
-          </a:p>
-          <a:p>
-            <a:pPr algn="l">
-              <a:lnSpc>
-                <a:spcPct val="140000"/>
-              </a:lnSpc>
-              <a:spcAft>
-                <a:spcPts val="800"/>
-              </a:spcAft>
-            </a:pPr>
-            <a:r>
-              <a:rPr sz="1600" b="1">
-                <a:solidFill>
-                  <a:srgbClr val="16A34A"/>
-                </a:solidFill>
-                <a:latin typeface="Calibri"/>
-              </a:rPr>
-              <a:t>● </a:t>
-            </a:r>
-            <a:r>
-              <a:rPr sz="1600">
-                <a:solidFill>
-                  <a:srgbClr val="0F2040"/>
-                </a:solidFill>
-                <a:latin typeface="Calibri"/>
-              </a:rPr>
-              <a:t>Solicitud de Compras (crear + ver propias)</a:t>
-            </a:r>
-          </a:p>
-          <a:p>
-            <a:pPr algn="l">
-              <a:lnSpc>
-                <a:spcPct val="140000"/>
-              </a:lnSpc>
-              <a:spcAft>
-                <a:spcPts val="800"/>
-              </a:spcAft>
-            </a:pPr>
-            <a:r>
-              <a:rPr sz="1600" b="1">
-                <a:solidFill>
-                  <a:srgbClr val="16A34A"/>
-                </a:solidFill>
-                <a:latin typeface="Calibri"/>
-              </a:rPr>
-              <a:t>● </a:t>
-            </a:r>
-            <a:r>
-              <a:rPr sz="1600">
-                <a:solidFill>
-                  <a:srgbClr val="0F2040"/>
-                </a:solidFill>
-                <a:latin typeface="Calibri"/>
-              </a:rPr>
-              <a:t>Reportes (ver)</a:t>
-            </a:r>
-          </a:p>
-          <a:p>
-            <a:pPr algn="l">
-              <a:lnSpc>
-                <a:spcPct val="140000"/>
-              </a:lnSpc>
-              <a:spcAft>
-                <a:spcPts val="800"/>
-              </a:spcAft>
-            </a:pPr>
-            <a:r>
-              <a:rPr sz="1600" b="1">
-                <a:solidFill>
-                  <a:srgbClr val="16A34A"/>
-                </a:solidFill>
-                <a:latin typeface="Calibri"/>
-              </a:rPr>
-              <a:t>● </a:t>
-            </a:r>
-            <a:r>
-              <a:rPr sz="1600">
-                <a:solidFill>
-                  <a:srgbClr val="0F2040"/>
-                </a:solidFill>
-                <a:latin typeface="Calibri"/>
-              </a:rPr>
-              <a:t>Notificaciones (relacionadas con tus solicitudes)</a:t>
+              <a:t>Vista del Dashboard con métricas principales</a:t>
             </a:r>
           </a:p>
         </p:txBody>
@@ -4636,7 +4373,7 @@
     <p:bg>
       <p:bgPr>
         <a:solidFill>
-          <a:srgbClr val="0F2040"/>
+          <a:srgbClr val="FFFFFF"/>
         </a:solidFill>
         <a:effectLst/>
       </p:bgPr>
@@ -4656,14 +4393,14 @@
         </p:nvSpPr>
         <p:spPr>
           <a:xfrm>
-            <a:off x="0" y="3108960"/>
-            <a:ext cx="12191695" cy="73152"/>
+            <a:off x="0" y="0"/>
+            <a:ext cx="12191695" cy="822960"/>
           </a:xfrm>
           <a:prstGeom prst="rect">
             <a:avLst/>
           </a:prstGeom>
           <a:solidFill>
-            <a:srgbClr val="16A34A"/>
+            <a:srgbClr val="0A1172"/>
           </a:solidFill>
           <a:ln>
             <a:noFill/>
@@ -4700,8 +4437,8 @@
         </p:nvSpPr>
         <p:spPr>
           <a:xfrm>
-            <a:off x="731520" y="2560320"/>
-            <a:ext cx="10698480" cy="640080"/>
+            <a:off x="365760" y="137160"/>
+            <a:ext cx="10058400" cy="548640"/>
           </a:xfrm>
           <a:prstGeom prst="rect">
             <a:avLst/>
@@ -4714,22 +4451,116 @@
           </a:bodyPr>
           <a:lstStyle/>
           <a:p>
+            <a:pPr algn="l"/>
+            <a:r>
+              <a:rPr sz="2200" b="1">
+                <a:solidFill>
+                  <a:srgbClr val="FFFFFF"/>
+                </a:solidFill>
+                <a:latin typeface="Calibri"/>
+              </a:rPr>
+              <a:t>Órdenes de Trabajo</a:t>
+            </a:r>
+          </a:p>
+        </p:txBody>
+      </p:sp>
+      <p:sp>
+        <p:nvSpPr>
+          <p:cNvPr id="4" name="TextBox 3"/>
+          <p:cNvSpPr txBox="1"/>
+          <p:nvPr/>
+        </p:nvSpPr>
+        <p:spPr>
+          <a:xfrm>
+            <a:off x="11247120" y="137160"/>
+            <a:ext cx="731520" cy="548640"/>
+          </a:xfrm>
+          <a:prstGeom prst="rect">
+            <a:avLst/>
+          </a:prstGeom>
+          <a:noFill/>
+        </p:spPr>
+        <p:txBody>
+          <a:bodyPr wrap="square" anchor="ctr" lIns="45720" rIns="45720">
+            <a:spAutoFit/>
+          </a:bodyPr>
+          <a:lstStyle/>
+          <a:p>
+            <a:pPr algn="r"/>
+            <a:r>
+              <a:rPr sz="1400" b="0">
+                <a:solidFill>
+                  <a:srgbClr val="F59E0B"/>
+                </a:solidFill>
+                <a:latin typeface="Calibri"/>
+              </a:rPr>
+              <a:t>4</a:t>
+            </a:r>
+          </a:p>
+        </p:txBody>
+      </p:sp>
+      <p:pic>
+        <p:nvPicPr>
+          <p:cNvPr id="5" name="Picture 4" descr="03_ot_listado.png"/>
+          <p:cNvPicPr>
+            <a:picLocks noChangeAspect="1"/>
+          </p:cNvPicPr>
+          <p:nvPr/>
+        </p:nvPicPr>
+        <p:blipFill>
+          <a:blip r:embed="rId2"/>
+          <a:stretch>
+            <a:fillRect/>
+          </a:stretch>
+        </p:blipFill>
+        <p:spPr>
+          <a:xfrm>
+            <a:off x="1386687" y="1097280"/>
+            <a:ext cx="9418320" cy="5886450"/>
+          </a:xfrm>
+          <a:prstGeom prst="rect">
+            <a:avLst/>
+          </a:prstGeom>
+        </p:spPr>
+      </p:pic>
+      <p:sp>
+        <p:nvSpPr>
+          <p:cNvPr id="6" name="TextBox 5"/>
+          <p:cNvSpPr txBox="1"/>
+          <p:nvPr/>
+        </p:nvSpPr>
+        <p:spPr>
+          <a:xfrm>
+            <a:off x="914400" y="6035040"/>
+            <a:ext cx="10332720" cy="457200"/>
+          </a:xfrm>
+          <a:prstGeom prst="rect">
+            <a:avLst/>
+          </a:prstGeom>
+          <a:noFill/>
+        </p:spPr>
+        <p:txBody>
+          <a:bodyPr wrap="square" anchor="ctr" lIns="45720" rIns="45720">
+            <a:spAutoFit/>
+          </a:bodyPr>
+          <a:lstStyle/>
+          <a:p>
             <a:pPr algn="ctr"/>
             <a:r>
-              <a:rPr sz="3600" b="1">
-                <a:solidFill>
-                  <a:srgbClr val="FFFFFF"/>
+              <a:rPr sz="1200" b="0">
+                <a:solidFill>
+                  <a:srgbClr val="666666"/>
                 </a:solidFill>
                 <a:latin typeface="Calibri"/>
               </a:rPr>
-              <a:t>Tus flujos principales</a:t>
-            </a:r>
-          </a:p>
-        </p:txBody>
-      </p:sp>
-      <p:sp>
-        <p:nvSpPr>
-          <p:cNvPr id="4" name="Rectangle 3"/>
+              <a:t>Listado de OT — el usuario puede ver y crear (no editar/eliminar)</a:t>
+            </a:r>
+          </a:p>
+        </p:txBody>
+      </p:sp>
+      <p:sp>
+        <p:nvSpPr>
+          <p:cNvPr id="7" name="Rectangle 6"/>
           <p:cNvSpPr/>
           <p:nvPr/>
         </p:nvSpPr>
@@ -4773,7 +4604,7 @@
       </p:sp>
       <p:sp>
         <p:nvSpPr>
-          <p:cNvPr id="5" name="TextBox 4"/>
+          <p:cNvPr id="8" name="TextBox 7"/>
           <p:cNvSpPr txBox="1"/>
           <p:nvPr/>
         </p:nvSpPr>
@@ -4808,7 +4639,7 @@
       </p:sp>
       <p:sp>
         <p:nvSpPr>
-          <p:cNvPr id="6" name="TextBox 5"/>
+          <p:cNvPr id="9" name="TextBox 8"/>
           <p:cNvSpPr txBox="1"/>
           <p:nvPr/>
         </p:nvSpPr>
@@ -5011,7 +4842,7 @@
                 </a:solidFill>
                 <a:latin typeface="Calibri"/>
               </a:rPr>
-              <a:t>Cómo solicitar la compra de materiales o servicios:</a:t>
+              <a:t>Cómo solicitar la compra de materiales:</a:t>
             </a:r>
           </a:p>
         </p:txBody>
@@ -5051,7 +4882,6 @@
                 <a:solidFill>
                   <a:srgbClr val="16A34A"/>
                 </a:solidFill>
-                <a:latin typeface="Calibri"/>
               </a:rPr>
               <a:t>1.  </a:t>
             </a:r>
@@ -5060,7 +4890,6 @@
                 <a:solidFill>
                   <a:srgbClr val="0F2040"/>
                 </a:solidFill>
-                <a:latin typeface="Calibri"/>
               </a:rPr>
               <a:t>Ve a Solicitud de Compras → "Nueva Solicitud"</a:t>
             </a:r>
@@ -5079,7 +4908,6 @@
                 <a:solidFill>
                   <a:srgbClr val="16A34A"/>
                 </a:solidFill>
-                <a:latin typeface="Calibri"/>
               </a:rPr>
               <a:t>2.  </a:t>
             </a:r>
@@ -5088,9 +4916,8 @@
                 <a:solidFill>
                   <a:srgbClr val="0F2040"/>
                 </a:solidFill>
-                <a:latin typeface="Calibri"/>
-              </a:rPr>
-              <a:t>Completa: título, descripción, prioridad (Baja/Media/Alta/Urgente)</a:t>
+              </a:rPr>
+              <a:t>Completa: título, descripción, prioridad</a:t>
             </a:r>
           </a:p>
           <a:p>
@@ -5107,7 +4934,6 @@
                 <a:solidFill>
                   <a:srgbClr val="16A34A"/>
                 </a:solidFill>
-                <a:latin typeface="Calibri"/>
               </a:rPr>
               <a:t>3.  </a:t>
             </a:r>
@@ -5116,7 +4942,6 @@
                 <a:solidFill>
                   <a:srgbClr val="0F2040"/>
                 </a:solidFill>
-                <a:latin typeface="Calibri"/>
               </a:rPr>
               <a:t>Indica fecha esperada de entrega</a:t>
             </a:r>
@@ -5135,7 +4960,6 @@
                 <a:solidFill>
                   <a:srgbClr val="16A34A"/>
                 </a:solidFill>
-                <a:latin typeface="Calibri"/>
               </a:rPr>
               <a:t>4.  </a:t>
             </a:r>
@@ -5144,9 +4968,8 @@
                 <a:solidFill>
                   <a:srgbClr val="0F2040"/>
                 </a:solidFill>
-                <a:latin typeface="Calibri"/>
-              </a:rPr>
-              <a:t>Agrega los materiales (nombre, cantidad, unidad, precio estimado)</a:t>
+              </a:rPr>
+              <a:t>Agrega los materiales (nombre, cantidad, precio)</a:t>
             </a:r>
           </a:p>
           <a:p>
@@ -5163,7 +4986,6 @@
                 <a:solidFill>
                   <a:srgbClr val="16A34A"/>
                 </a:solidFill>
-                <a:latin typeface="Calibri"/>
               </a:rPr>
               <a:t>5.  </a:t>
             </a:r>
@@ -5172,9 +4994,8 @@
                 <a:solidFill>
                   <a:srgbClr val="0F2040"/>
                 </a:solidFill>
-                <a:latin typeface="Calibri"/>
-              </a:rPr>
-              <a:t>Opcional: proveedor sugerido, links de compra</a:t>
+              </a:rPr>
+              <a:t>Guarda → se envía email automático</a:t>
             </a:r>
           </a:p>
           <a:p>
@@ -5191,7 +5012,6 @@
                 <a:solidFill>
                   <a:srgbClr val="16A34A"/>
                 </a:solidFill>
-                <a:latin typeface="Calibri"/>
               </a:rPr>
               <a:t>6.  </a:t>
             </a:r>
@@ -5200,9 +5020,8 @@
                 <a:solidFill>
                   <a:srgbClr val="0F2040"/>
                 </a:solidFill>
-                <a:latin typeface="Calibri"/>
-              </a:rPr>
-              <a:t>Guarda → se envía email automático a administración</a:t>
+              </a:rPr>
+              <a:t>Tu SC queda en etapa "Pendiente Supervisor"</a:t>
             </a:r>
           </a:p>
           <a:p>
@@ -5219,7 +5038,6 @@
                 <a:solidFill>
                   <a:srgbClr val="16A34A"/>
                 </a:solidFill>
-                <a:latin typeface="Calibri"/>
               </a:rPr>
               <a:t>7.  </a:t>
             </a:r>
@@ -5228,37 +5046,8 @@
                 <a:solidFill>
                   <a:srgbClr val="0F2040"/>
                 </a:solidFill>
-                <a:latin typeface="Calibri"/>
-              </a:rPr>
-              <a:t>Tu SC queda en etapa "Pendiente Supervisor"</a:t>
-            </a:r>
-          </a:p>
-          <a:p>
-            <a:pPr algn="l">
-              <a:lnSpc>
-                <a:spcPct val="150000"/>
-              </a:lnSpc>
-              <a:spcAft>
-                <a:spcPts val="1000"/>
-              </a:spcAft>
-            </a:pPr>
-            <a:r>
-              <a:rPr sz="2000" b="1">
-                <a:solidFill>
-                  <a:srgbClr val="16A34A"/>
-                </a:solidFill>
-                <a:latin typeface="Calibri"/>
-              </a:rPr>
-              <a:t>8.  </a:t>
-            </a:r>
-            <a:r>
-              <a:rPr sz="1600">
-                <a:solidFill>
-                  <a:srgbClr val="0F2040"/>
-                </a:solidFill>
-                <a:latin typeface="Calibri"/>
-              </a:rPr>
-              <a:t>Recibirás notificaciones cuando: supervisor apruebe/rechace, admin gestione</a:t>
+              </a:rPr>
+              <a:t>Recibirás notificaciones en cada etapa del flujo</a:t>
             </a:r>
           </a:p>
         </p:txBody>
@@ -5477,7 +5266,7 @@
                 </a:solidFill>
                 <a:latin typeface="Calibri"/>
               </a:rPr>
-              <a:t>Flujo: Crear Orden de Trabajo</a:t>
+              <a:t>Crear Nueva SC</a:t>
             </a:r>
           </a:p>
         </p:txBody>
@@ -5517,16 +5306,40 @@
           </a:p>
         </p:txBody>
       </p:sp>
-      <p:sp>
-        <p:nvSpPr>
-          <p:cNvPr id="5" name="TextBox 4"/>
+      <p:pic>
+        <p:nvPicPr>
+          <p:cNvPr id="5" name="Picture 4" descr="11_sc_crear.png"/>
+          <p:cNvPicPr>
+            <a:picLocks noChangeAspect="1"/>
+          </p:cNvPicPr>
+          <p:nvPr/>
+        </p:nvPicPr>
+        <p:blipFill>
+          <a:blip r:embed="rId2"/>
+          <a:stretch>
+            <a:fillRect/>
+          </a:stretch>
+        </p:blipFill>
+        <p:spPr>
+          <a:xfrm>
+            <a:off x="1386687" y="1097280"/>
+            <a:ext cx="9418320" cy="5886450"/>
+          </a:xfrm>
+          <a:prstGeom prst="rect">
+            <a:avLst/>
+          </a:prstGeom>
+        </p:spPr>
+      </p:pic>
+      <p:sp>
+        <p:nvSpPr>
+          <p:cNvPr id="6" name="TextBox 5"/>
           <p:cNvSpPr txBox="1"/>
           <p:nvPr/>
         </p:nvSpPr>
         <p:spPr>
           <a:xfrm>
-            <a:off x="457200" y="1005840"/>
-            <a:ext cx="11247120" cy="548640"/>
+            <a:off x="914400" y="6035040"/>
+            <a:ext cx="10332720" cy="457200"/>
           </a:xfrm>
           <a:prstGeom prst="rect">
             <a:avLst/>
@@ -5534,239 +5347,20 @@
           <a:noFill/>
         </p:spPr>
         <p:txBody>
-          <a:bodyPr wrap="square" anchor="t" lIns="45720" rIns="45720">
+          <a:bodyPr wrap="square" anchor="ctr" lIns="45720" rIns="45720">
             <a:spAutoFit/>
           </a:bodyPr>
           <a:lstStyle/>
           <a:p>
-            <a:pPr algn="l"/>
-            <a:r>
-              <a:rPr sz="1400" b="0">
+            <a:pPr algn="ctr"/>
+            <a:r>
+              <a:rPr sz="1200" b="0">
                 <a:solidFill>
                   <a:srgbClr val="666666"/>
                 </a:solidFill>
                 <a:latin typeface="Calibri"/>
               </a:rPr>
-              <a:t>Cómo reportar una mantención o reparación necesaria:</a:t>
-            </a:r>
-          </a:p>
-        </p:txBody>
-      </p:sp>
-      <p:sp>
-        <p:nvSpPr>
-          <p:cNvPr id="6" name="TextBox 5"/>
-          <p:cNvSpPr txBox="1"/>
-          <p:nvPr/>
-        </p:nvSpPr>
-        <p:spPr>
-          <a:xfrm>
-            <a:off x="640080" y="1645920"/>
-            <a:ext cx="10972800" cy="4572000"/>
-          </a:xfrm>
-          <a:prstGeom prst="rect">
-            <a:avLst/>
-          </a:prstGeom>
-          <a:noFill/>
-        </p:spPr>
-        <p:txBody>
-          <a:bodyPr wrap="square">
-            <a:spAutoFit/>
-          </a:bodyPr>
-          <a:lstStyle/>
-          <a:p>
-            <a:pPr algn="l">
-              <a:lnSpc>
-                <a:spcPct val="150000"/>
-              </a:lnSpc>
-              <a:spcAft>
-                <a:spcPts val="1000"/>
-              </a:spcAft>
-            </a:pPr>
-            <a:r>
-              <a:rPr sz="2000" b="1">
-                <a:solidFill>
-                  <a:srgbClr val="16A34A"/>
-                </a:solidFill>
-                <a:latin typeface="Calibri"/>
-              </a:rPr>
-              <a:t>1.  </a:t>
-            </a:r>
-            <a:r>
-              <a:rPr sz="1600">
-                <a:solidFill>
-                  <a:srgbClr val="0F2040"/>
-                </a:solidFill>
-                <a:latin typeface="Calibri"/>
-              </a:rPr>
-              <a:t>Ve a Órdenes de Trabajo → "Nueva OT"</a:t>
-            </a:r>
-          </a:p>
-          <a:p>
-            <a:pPr algn="l">
-              <a:lnSpc>
-                <a:spcPct val="150000"/>
-              </a:lnSpc>
-              <a:spcAft>
-                <a:spcPts val="1000"/>
-              </a:spcAft>
-            </a:pPr>
-            <a:r>
-              <a:rPr sz="2000" b="1">
-                <a:solidFill>
-                  <a:srgbClr val="16A34A"/>
-                </a:solidFill>
-                <a:latin typeface="Calibri"/>
-              </a:rPr>
-              <a:t>2.  </a:t>
-            </a:r>
-            <a:r>
-              <a:rPr sz="1600">
-                <a:solidFill>
-                  <a:srgbClr val="0F2040"/>
-                </a:solidFill>
-                <a:latin typeface="Calibri"/>
-              </a:rPr>
-              <a:t>Completa: título, propiedad, prioridad</a:t>
-            </a:r>
-          </a:p>
-          <a:p>
-            <a:pPr algn="l">
-              <a:lnSpc>
-                <a:spcPct val="150000"/>
-              </a:lnSpc>
-              <a:spcAft>
-                <a:spcPts val="1000"/>
-              </a:spcAft>
-            </a:pPr>
-            <a:r>
-              <a:rPr sz="2000" b="1">
-                <a:solidFill>
-                  <a:srgbClr val="16A34A"/>
-                </a:solidFill>
-                <a:latin typeface="Calibri"/>
-              </a:rPr>
-              <a:t>3.  </a:t>
-            </a:r>
-            <a:r>
-              <a:rPr sz="1600">
-                <a:solidFill>
-                  <a:srgbClr val="0F2040"/>
-                </a:solidFill>
-                <a:latin typeface="Calibri"/>
-              </a:rPr>
-              <a:t>Describe el problema en detalle</a:t>
-            </a:r>
-          </a:p>
-          <a:p>
-            <a:pPr algn="l">
-              <a:lnSpc>
-                <a:spcPct val="150000"/>
-              </a:lnSpc>
-              <a:spcAft>
-                <a:spcPts val="1000"/>
-              </a:spcAft>
-            </a:pPr>
-            <a:r>
-              <a:rPr sz="2000" b="1">
-                <a:solidFill>
-                  <a:srgbClr val="16A34A"/>
-                </a:solidFill>
-                <a:latin typeface="Calibri"/>
-              </a:rPr>
-              <a:t>4.  </a:t>
-            </a:r>
-            <a:r>
-              <a:rPr sz="1600">
-                <a:solidFill>
-                  <a:srgbClr val="0F2040"/>
-                </a:solidFill>
-                <a:latin typeface="Calibri"/>
-              </a:rPr>
-              <a:t>Agrega materiales y herramientas necesarias (si los conoces)</a:t>
-            </a:r>
-          </a:p>
-          <a:p>
-            <a:pPr algn="l">
-              <a:lnSpc>
-                <a:spcPct val="150000"/>
-              </a:lnSpc>
-              <a:spcAft>
-                <a:spcPts val="1000"/>
-              </a:spcAft>
-            </a:pPr>
-            <a:r>
-              <a:rPr sz="2000" b="1">
-                <a:solidFill>
-                  <a:srgbClr val="16A34A"/>
-                </a:solidFill>
-                <a:latin typeface="Calibri"/>
-              </a:rPr>
-              <a:t>5.  </a:t>
-            </a:r>
-            <a:r>
-              <a:rPr sz="1600">
-                <a:solidFill>
-                  <a:srgbClr val="0F2040"/>
-                </a:solidFill>
-                <a:latin typeface="Calibri"/>
-              </a:rPr>
-              <a:t>Guarda → la OT queda en estado "Pendiente"</a:t>
-            </a:r>
-          </a:p>
-          <a:p>
-            <a:pPr algn="l">
-              <a:lnSpc>
-                <a:spcPct val="150000"/>
-              </a:lnSpc>
-              <a:spcAft>
-                <a:spcPts val="1000"/>
-              </a:spcAft>
-            </a:pPr>
-            <a:r>
-              <a:rPr sz="2000" b="1">
-                <a:solidFill>
-                  <a:srgbClr val="16A34A"/>
-                </a:solidFill>
-                <a:latin typeface="Calibri"/>
-              </a:rPr>
-              <a:t>6.  </a:t>
-            </a:r>
-            <a:r>
-              <a:rPr sz="1600">
-                <a:solidFill>
-                  <a:srgbClr val="0F2040"/>
-                </a:solidFill>
-                <a:latin typeface="Calibri"/>
-              </a:rPr>
-              <a:t>El supervisor/admin la asignará a un trabajador</a:t>
-            </a:r>
-          </a:p>
-          <a:p>
-            <a:pPr algn="l">
-              <a:lnSpc>
-                <a:spcPct val="150000"/>
-              </a:lnSpc>
-              <a:spcAft>
-                <a:spcPts val="1000"/>
-              </a:spcAft>
-            </a:pPr>
-            <a:r>
-              <a:rPr sz="2000" b="1">
-                <a:solidFill>
-                  <a:srgbClr val="16A34A"/>
-                </a:solidFill>
-                <a:latin typeface="Calibri"/>
-              </a:rPr>
-              <a:t>7.  </a:t>
-            </a:r>
-            <a:r>
-              <a:rPr sz="1600">
-                <a:solidFill>
-                  <a:srgbClr val="0F2040"/>
-                </a:solidFill>
-                <a:latin typeface="Calibri"/>
-              </a:rPr>
-              <a:t>Puedes hacer seguimiento del estado desde el módulo OT</a:t>
+              <a:t>Formulario de creación de Solicitud de Compra</a:t>
             </a:r>
           </a:p>
         </p:txBody>
@@ -5985,7 +5579,7 @@
                 </a:solidFill>
                 <a:latin typeface="Calibri"/>
               </a:rPr>
-              <a:t>Seguimiento de tus Solicitudes</a:t>
+              <a:t>Crear Nueva OT</a:t>
             </a:r>
           </a:p>
         </p:txBody>
@@ -6025,22 +5619,81 @@
           </a:p>
         </p:txBody>
       </p:sp>
-      <p:sp>
-        <p:nvSpPr>
-          <p:cNvPr id="5" name="Rounded Rectangle 4"/>
+      <p:pic>
+        <p:nvPicPr>
+          <p:cNvPr id="5" name="Picture 4" descr="10_ot_crear.png"/>
+          <p:cNvPicPr>
+            <a:picLocks noChangeAspect="1"/>
+          </p:cNvPicPr>
+          <p:nvPr/>
+        </p:nvPicPr>
+        <p:blipFill>
+          <a:blip r:embed="rId2"/>
+          <a:stretch>
+            <a:fillRect/>
+          </a:stretch>
+        </p:blipFill>
+        <p:spPr>
+          <a:xfrm>
+            <a:off x="1386687" y="1097280"/>
+            <a:ext cx="9418320" cy="5886450"/>
+          </a:xfrm>
+          <a:prstGeom prst="rect">
+            <a:avLst/>
+          </a:prstGeom>
+        </p:spPr>
+      </p:pic>
+      <p:sp>
+        <p:nvSpPr>
+          <p:cNvPr id="6" name="TextBox 5"/>
+          <p:cNvSpPr txBox="1"/>
+          <p:nvPr/>
+        </p:nvSpPr>
+        <p:spPr>
+          <a:xfrm>
+            <a:off x="914400" y="6035040"/>
+            <a:ext cx="10332720" cy="457200"/>
+          </a:xfrm>
+          <a:prstGeom prst="rect">
+            <a:avLst/>
+          </a:prstGeom>
+          <a:noFill/>
+        </p:spPr>
+        <p:txBody>
+          <a:bodyPr wrap="square" anchor="ctr" lIns="45720" rIns="45720">
+            <a:spAutoFit/>
+          </a:bodyPr>
+          <a:lstStyle/>
+          <a:p>
+            <a:pPr algn="ctr"/>
+            <a:r>
+              <a:rPr sz="1200" b="0">
+                <a:solidFill>
+                  <a:srgbClr val="666666"/>
+                </a:solidFill>
+                <a:latin typeface="Calibri"/>
+              </a:rPr>
+              <a:t>Formulario de creación de Orden de Trabajo</a:t>
+            </a:r>
+          </a:p>
+        </p:txBody>
+      </p:sp>
+      <p:sp>
+        <p:nvSpPr>
+          <p:cNvPr id="7" name="Rectangle 6"/>
           <p:cNvSpPr/>
           <p:nvPr/>
         </p:nvSpPr>
         <p:spPr>
           <a:xfrm>
-            <a:off x="365760" y="1097280"/>
-            <a:ext cx="5577840" cy="548640"/>
-          </a:xfrm>
-          <a:prstGeom prst="roundRect">
+            <a:off x="0" y="6583680"/>
+            <a:ext cx="12191695" cy="274320"/>
+          </a:xfrm>
+          <a:prstGeom prst="rect">
             <a:avLst/>
           </a:prstGeom>
           <a:solidFill>
-            <a:srgbClr val="16A34A"/>
+            <a:srgbClr val="0F2040"/>
           </a:solidFill>
           <a:ln>
             <a:noFill/>
@@ -6071,14 +5724,14 @@
       </p:sp>
       <p:sp>
         <p:nvSpPr>
-          <p:cNvPr id="6" name="TextBox 5"/>
+          <p:cNvPr id="8" name="TextBox 7"/>
           <p:cNvSpPr txBox="1"/>
           <p:nvPr/>
         </p:nvSpPr>
         <p:spPr>
           <a:xfrm>
-            <a:off x="365760" y="1097280"/>
-            <a:ext cx="5577840" cy="548640"/>
+            <a:off x="365760" y="6583680"/>
+            <a:ext cx="6400800" cy="274320"/>
           </a:xfrm>
           <a:prstGeom prst="rect">
             <a:avLst/>
@@ -6091,506 +5744,22 @@
           </a:bodyPr>
           <a:lstStyle/>
           <a:p>
-            <a:pPr algn="ctr"/>
-            <a:r>
-              <a:rPr sz="1800" b="1">
+            <a:pPr algn="l"/>
+            <a:r>
+              <a:rPr sz="900" b="0">
                 <a:solidFill>
                   <a:srgbClr val="FFFFFF"/>
                 </a:solidFill>
                 <a:latin typeface="Calibri"/>
               </a:rPr>
-              <a:t>En Solicitud de Compras solo ves las que TÚ creaste:</a:t>
-            </a:r>
-          </a:p>
-        </p:txBody>
-      </p:sp>
-      <p:sp>
-        <p:nvSpPr>
-          <p:cNvPr id="7" name="TextBox 6"/>
-          <p:cNvSpPr txBox="1"/>
-          <p:nvPr/>
-        </p:nvSpPr>
-        <p:spPr>
-          <a:xfrm>
-            <a:off x="457200" y="1828800"/>
-            <a:ext cx="5394960" cy="4572000"/>
-          </a:xfrm>
-          <a:prstGeom prst="rect">
-            <a:avLst/>
-          </a:prstGeom>
-          <a:noFill/>
-        </p:spPr>
-        <p:txBody>
-          <a:bodyPr wrap="square">
-            <a:spAutoFit/>
-          </a:bodyPr>
-          <a:lstStyle/>
-          <a:p>
-            <a:pPr algn="l">
-              <a:lnSpc>
-                <a:spcPct val="140000"/>
-              </a:lnSpc>
-              <a:spcAft>
-                <a:spcPts val="800"/>
-              </a:spcAft>
-            </a:pPr>
-            <a:r>
-              <a:rPr sz="1400" b="1">
-                <a:solidFill>
-                  <a:srgbClr val="16A34A"/>
-                </a:solidFill>
-                <a:latin typeface="Calibri"/>
-              </a:rPr>
-              <a:t>● </a:t>
-            </a:r>
-            <a:r>
-              <a:rPr sz="1400">
-                <a:solidFill>
-                  <a:srgbClr val="0F2040"/>
-                </a:solidFill>
-                <a:latin typeface="Calibri"/>
-              </a:rPr>
-              <a:t>Filtra por estado: Solicitado, En Proceso, Comprado, Rechazado</a:t>
-            </a:r>
-          </a:p>
-          <a:p>
-            <a:pPr algn="l">
-              <a:lnSpc>
-                <a:spcPct val="140000"/>
-              </a:lnSpc>
-              <a:spcAft>
-                <a:spcPts val="800"/>
-              </a:spcAft>
-            </a:pPr>
-            <a:r>
-              <a:rPr sz="1400" b="1">
-                <a:solidFill>
-                  <a:srgbClr val="16A34A"/>
-                </a:solidFill>
-                <a:latin typeface="Calibri"/>
-              </a:rPr>
-              <a:t>● </a:t>
-            </a:r>
-            <a:r>
-              <a:rPr sz="1400">
-                <a:solidFill>
-                  <a:srgbClr val="0F2040"/>
-                </a:solidFill>
-                <a:latin typeface="Calibri"/>
-              </a:rPr>
-              <a:t>Filtra por prioridad</a:t>
-            </a:r>
-          </a:p>
-          <a:p>
-            <a:pPr algn="l">
-              <a:lnSpc>
-                <a:spcPct val="140000"/>
-              </a:lnSpc>
-              <a:spcAft>
-                <a:spcPts val="800"/>
-              </a:spcAft>
-            </a:pPr>
-            <a:r>
-              <a:rPr sz="1400" b="1">
-                <a:solidFill>
-                  <a:srgbClr val="16A34A"/>
-                </a:solidFill>
-                <a:latin typeface="Calibri"/>
-              </a:rPr>
-              <a:t>● </a:t>
-            </a:r>
-            <a:r>
-              <a:rPr sz="1400">
-                <a:solidFill>
-                  <a:srgbClr val="0F2040"/>
-                </a:solidFill>
-                <a:latin typeface="Calibri"/>
-              </a:rPr>
-              <a:t>Busca por código (SC-0001) o título</a:t>
-            </a:r>
-          </a:p>
-          <a:p>
-            <a:pPr algn="l">
-              <a:lnSpc>
-                <a:spcPct val="140000"/>
-              </a:lnSpc>
-              <a:spcAft>
-                <a:spcPts val="800"/>
-              </a:spcAft>
-            </a:pPr>
-            <a:r>
-              <a:rPr sz="1400" b="1">
-                <a:solidFill>
-                  <a:srgbClr val="16A34A"/>
-                </a:solidFill>
-                <a:latin typeface="Calibri"/>
-              </a:rPr>
-              <a:t>● </a:t>
-            </a:r>
-            <a:r>
-              <a:rPr sz="1400">
-                <a:solidFill>
-                  <a:srgbClr val="0F2040"/>
-                </a:solidFill>
-                <a:latin typeface="Calibri"/>
-              </a:rPr>
-              <a:t>Haz clic para ver el detalle completo</a:t>
-            </a:r>
-          </a:p>
-          <a:p>
-            <a:pPr algn="l">
-              <a:lnSpc>
-                <a:spcPct val="140000"/>
-              </a:lnSpc>
-              <a:spcAft>
-                <a:spcPts val="800"/>
-              </a:spcAft>
-            </a:pPr>
-            <a:r>
-              <a:rPr sz="1400" b="1">
-                <a:solidFill>
-                  <a:srgbClr val="16A34A"/>
-                </a:solidFill>
-                <a:latin typeface="Calibri"/>
-              </a:rPr>
-              <a:t>● </a:t>
-            </a:r>
-            <a:r>
-              <a:rPr sz="1400">
-                <a:solidFill>
-                  <a:srgbClr val="0F2040"/>
-                </a:solidFill>
-                <a:latin typeface="Calibri"/>
-              </a:rPr>
-              <a:t>Verás la etapa de aprobación actual</a:t>
-            </a:r>
-          </a:p>
-        </p:txBody>
-      </p:sp>
-      <p:sp>
-        <p:nvSpPr>
-          <p:cNvPr id="8" name="Rounded Rectangle 7"/>
-          <p:cNvSpPr/>
-          <p:nvPr/>
-        </p:nvSpPr>
-        <p:spPr>
-          <a:xfrm>
-            <a:off x="6217920" y="1097280"/>
-            <a:ext cx="5577840" cy="548640"/>
-          </a:xfrm>
-          <a:prstGeom prst="roundRect">
-            <a:avLst/>
-          </a:prstGeom>
-          <a:solidFill>
-            <a:srgbClr val="0A1172"/>
-          </a:solidFill>
-          <a:ln>
-            <a:noFill/>
-          </a:ln>
-          <a:effectLst/>
-        </p:spPr>
-        <p:style>
-          <a:lnRef idx="1">
-            <a:schemeClr val="accent1"/>
-          </a:lnRef>
-          <a:fillRef idx="3">
-            <a:schemeClr val="accent1"/>
-          </a:fillRef>
-          <a:effectRef idx="2">
-            <a:schemeClr val="accent1"/>
-          </a:effectRef>
-          <a:fontRef idx="minor">
-            <a:schemeClr val="lt1"/>
-          </a:fontRef>
-        </p:style>
-        <p:txBody>
-          <a:bodyPr rtlCol="0" anchor="ctr"/>
-          <a:lstStyle/>
-          <a:p>
-            <a:pPr algn="ctr"/>
+              <a:t>Asesorías Integrales CyJ · Capacitación Usuario</a:t>
+            </a:r>
           </a:p>
         </p:txBody>
       </p:sp>
       <p:sp>
         <p:nvSpPr>
           <p:cNvPr id="9" name="TextBox 8"/>
-          <p:cNvSpPr txBox="1"/>
-          <p:nvPr/>
-        </p:nvSpPr>
-        <p:spPr>
-          <a:xfrm>
-            <a:off x="6217920" y="1097280"/>
-            <a:ext cx="5577840" cy="548640"/>
-          </a:xfrm>
-          <a:prstGeom prst="rect">
-            <a:avLst/>
-          </a:prstGeom>
-          <a:noFill/>
-        </p:spPr>
-        <p:txBody>
-          <a:bodyPr wrap="square" anchor="ctr" lIns="45720" rIns="45720">
-            <a:spAutoFit/>
-          </a:bodyPr>
-          <a:lstStyle/>
-          <a:p>
-            <a:pPr algn="ctr"/>
-            <a:r>
-              <a:rPr sz="1800" b="1">
-                <a:solidFill>
-                  <a:srgbClr val="FFFFFF"/>
-                </a:solidFill>
-                <a:latin typeface="Calibri"/>
-              </a:rPr>
-              <a:t>Estados que verás:</a:t>
-            </a:r>
-          </a:p>
-        </p:txBody>
-      </p:sp>
-      <p:sp>
-        <p:nvSpPr>
-          <p:cNvPr id="10" name="TextBox 9"/>
-          <p:cNvSpPr txBox="1"/>
-          <p:nvPr/>
-        </p:nvSpPr>
-        <p:spPr>
-          <a:xfrm>
-            <a:off x="6309360" y="1828800"/>
-            <a:ext cx="5394960" cy="4572000"/>
-          </a:xfrm>
-          <a:prstGeom prst="rect">
-            <a:avLst/>
-          </a:prstGeom>
-          <a:noFill/>
-        </p:spPr>
-        <p:txBody>
-          <a:bodyPr wrap="square">
-            <a:spAutoFit/>
-          </a:bodyPr>
-          <a:lstStyle/>
-          <a:p>
-            <a:pPr algn="l">
-              <a:lnSpc>
-                <a:spcPct val="140000"/>
-              </a:lnSpc>
-              <a:spcAft>
-                <a:spcPts val="800"/>
-              </a:spcAft>
-            </a:pPr>
-            <a:r>
-              <a:rPr sz="1400" b="1">
-                <a:solidFill>
-                  <a:srgbClr val="0A1172"/>
-                </a:solidFill>
-                <a:latin typeface="Calibri"/>
-              </a:rPr>
-              <a:t>● </a:t>
-            </a:r>
-            <a:r>
-              <a:rPr sz="1400">
-                <a:solidFill>
-                  <a:srgbClr val="0F2040"/>
-                </a:solidFill>
-                <a:latin typeface="Calibri"/>
-              </a:rPr>
-              <a:t>Solicitado → esperando supervisor</a:t>
-            </a:r>
-          </a:p>
-          <a:p>
-            <a:pPr algn="l">
-              <a:lnSpc>
-                <a:spcPct val="140000"/>
-              </a:lnSpc>
-              <a:spcAft>
-                <a:spcPts val="800"/>
-              </a:spcAft>
-            </a:pPr>
-            <a:r>
-              <a:rPr sz="1400" b="1">
-                <a:solidFill>
-                  <a:srgbClr val="0A1172"/>
-                </a:solidFill>
-                <a:latin typeface="Calibri"/>
-              </a:rPr>
-              <a:t>● </a:t>
-            </a:r>
-            <a:r>
-              <a:rPr sz="1400">
-                <a:solidFill>
-                  <a:srgbClr val="0F2040"/>
-                </a:solidFill>
-                <a:latin typeface="Calibri"/>
-              </a:rPr>
-              <a:t>Aprobada Supervisor → esperando admin</a:t>
-            </a:r>
-          </a:p>
-          <a:p>
-            <a:pPr algn="l">
-              <a:lnSpc>
-                <a:spcPct val="140000"/>
-              </a:lnSpc>
-              <a:spcAft>
-                <a:spcPts val="800"/>
-              </a:spcAft>
-            </a:pPr>
-            <a:r>
-              <a:rPr sz="1400" b="1">
-                <a:solidFill>
-                  <a:srgbClr val="0A1172"/>
-                </a:solidFill>
-                <a:latin typeface="Calibri"/>
-              </a:rPr>
-              <a:t>● </a:t>
-            </a:r>
-            <a:r>
-              <a:rPr sz="1400">
-                <a:solidFill>
-                  <a:srgbClr val="0F2040"/>
-                </a:solidFill>
-                <a:latin typeface="Calibri"/>
-              </a:rPr>
-              <a:t>En Proceso → admin gestionando compra</a:t>
-            </a:r>
-          </a:p>
-          <a:p>
-            <a:pPr algn="l">
-              <a:lnSpc>
-                <a:spcPct val="140000"/>
-              </a:lnSpc>
-              <a:spcAft>
-                <a:spcPts val="800"/>
-              </a:spcAft>
-            </a:pPr>
-            <a:r>
-              <a:rPr sz="1400" b="1">
-                <a:solidFill>
-                  <a:srgbClr val="0A1172"/>
-                </a:solidFill>
-                <a:latin typeface="Calibri"/>
-              </a:rPr>
-              <a:t>● </a:t>
-            </a:r>
-            <a:r>
-              <a:rPr sz="1400">
-                <a:solidFill>
-                  <a:srgbClr val="0F2040"/>
-                </a:solidFill>
-                <a:latin typeface="Calibri"/>
-              </a:rPr>
-              <a:t>Comprado → compra realizada</a:t>
-            </a:r>
-          </a:p>
-          <a:p>
-            <a:pPr algn="l">
-              <a:lnSpc>
-                <a:spcPct val="140000"/>
-              </a:lnSpc>
-              <a:spcAft>
-                <a:spcPts val="800"/>
-              </a:spcAft>
-            </a:pPr>
-            <a:r>
-              <a:rPr sz="1400" b="1">
-                <a:solidFill>
-                  <a:srgbClr val="0A1172"/>
-                </a:solidFill>
-                <a:latin typeface="Calibri"/>
-              </a:rPr>
-              <a:t>● </a:t>
-            </a:r>
-            <a:r>
-              <a:rPr sz="1400">
-                <a:solidFill>
-                  <a:srgbClr val="0F2040"/>
-                </a:solidFill>
-                <a:latin typeface="Calibri"/>
-              </a:rPr>
-              <a:t>Rechazada → con motivo del rechazo</a:t>
-            </a:r>
-          </a:p>
-        </p:txBody>
-      </p:sp>
-      <p:sp>
-        <p:nvSpPr>
-          <p:cNvPr id="11" name="Rectangle 10"/>
-          <p:cNvSpPr/>
-          <p:nvPr/>
-        </p:nvSpPr>
-        <p:spPr>
-          <a:xfrm>
-            <a:off x="0" y="6583680"/>
-            <a:ext cx="12191695" cy="274320"/>
-          </a:xfrm>
-          <a:prstGeom prst="rect">
-            <a:avLst/>
-          </a:prstGeom>
-          <a:solidFill>
-            <a:srgbClr val="0F2040"/>
-          </a:solidFill>
-          <a:ln>
-            <a:noFill/>
-          </a:ln>
-          <a:effectLst/>
-        </p:spPr>
-        <p:style>
-          <a:lnRef idx="1">
-            <a:schemeClr val="accent1"/>
-          </a:lnRef>
-          <a:fillRef idx="3">
-            <a:schemeClr val="accent1"/>
-          </a:fillRef>
-          <a:effectRef idx="2">
-            <a:schemeClr val="accent1"/>
-          </a:effectRef>
-          <a:fontRef idx="minor">
-            <a:schemeClr val="lt1"/>
-          </a:fontRef>
-        </p:style>
-        <p:txBody>
-          <a:bodyPr rtlCol="0" anchor="ctr"/>
-          <a:lstStyle/>
-          <a:p>
-            <a:pPr algn="ctr"/>
-          </a:p>
-        </p:txBody>
-      </p:sp>
-      <p:sp>
-        <p:nvSpPr>
-          <p:cNvPr id="12" name="TextBox 11"/>
-          <p:cNvSpPr txBox="1"/>
-          <p:nvPr/>
-        </p:nvSpPr>
-        <p:spPr>
-          <a:xfrm>
-            <a:off x="365760" y="6583680"/>
-            <a:ext cx="6400800" cy="274320"/>
-          </a:xfrm>
-          <a:prstGeom prst="rect">
-            <a:avLst/>
-          </a:prstGeom>
-          <a:noFill/>
-        </p:spPr>
-        <p:txBody>
-          <a:bodyPr wrap="square" anchor="ctr" lIns="45720" rIns="45720">
-            <a:spAutoFit/>
-          </a:bodyPr>
-          <a:lstStyle/>
-          <a:p>
-            <a:pPr algn="l"/>
-            <a:r>
-              <a:rPr sz="900" b="0">
-                <a:solidFill>
-                  <a:srgbClr val="FFFFFF"/>
-                </a:solidFill>
-                <a:latin typeface="Calibri"/>
-              </a:rPr>
-              <a:t>Asesorías Integrales CyJ · Capacitación Usuario</a:t>
-            </a:r>
-          </a:p>
-        </p:txBody>
-      </p:sp>
-      <p:sp>
-        <p:nvSpPr>
-          <p:cNvPr id="13" name="TextBox 12"/>
           <p:cNvSpPr txBox="1"/>
           <p:nvPr/>
         </p:nvSpPr>
@@ -6723,7 +5892,7 @@
                 </a:solidFill>
                 <a:latin typeface="Calibri"/>
               </a:rPr>
-              <a:t>No puedes hacer</a:t>
+              <a:t>Seguimiento de tus solicitudes</a:t>
             </a:r>
           </a:p>
         </p:txBody>
@@ -6822,7 +5991,7 @@
             <a:avLst/>
           </a:prstGeom>
           <a:solidFill>
-            <a:srgbClr val="DC2626"/>
+            <a:srgbClr val="0369A1"/>
           </a:solidFill>
           <a:ln>
             <a:noFill/>
@@ -6877,11 +6046,11 @@
             <a:r>
               <a:rPr sz="8000" b="0">
                 <a:solidFill>
-                  <a:srgbClr val="DC2626"/>
+                  <a:srgbClr val="0369A1"/>
                 </a:solidFill>
                 <a:latin typeface="Calibri"/>
               </a:rPr>
-              <a:t>⛔</a:t>
+              <a:t>ℹ️</a:t>
             </a:r>
           </a:p>
         </p:txBody>
@@ -6916,13 +6085,7 @@
                 </a:solidFill>
                 <a:latin typeface="Calibri"/>
               </a:rPr>
-              <a:t>Limitaciones del rol Usuario:
-✗ Editar o eliminar OT (solo crear)
-✗ Aprobar OT o SC (eso lo hace supervisor/admin)
-✗ Ver módulos admin (Usuarios, Permisos, Respaldos, Auditoría)
-✗ Ver Personal, Proveedores, Centro de Costos
-✗ Ver Cumplimiento Legal o Solicitudes de otros usuarios
-✗ Exportar reportes a PDF/Excel</a:t>
+              <a:t>En Solicitud de Compras solo ves las que TÚ creaste. Puedes filtrar por estado y prioridad. Recibirás notificaciones cuando el supervisor apruebe/rechace y cuando el admin gestione la compra.</a:t>
             </a:r>
           </a:p>
         </p:txBody>
@@ -7211,7 +6374,7 @@
                 </a:solidFill>
                 <a:latin typeface="Calibri"/>
               </a:rPr>
-              <a:t>Credenciales de prueba para capacitación:</a:t>
+              <a:t>Credenciales de prueba:</a:t>
             </a:r>
           </a:p>
         </p:txBody>
@@ -7251,7 +6414,6 @@
                 <a:solidFill>
                   <a:srgbClr val="16A34A"/>
                 </a:solidFill>
-                <a:latin typeface="Calibri"/>
               </a:rPr>
               <a:t>● </a:t>
             </a:r>
@@ -7260,7 +6422,6 @@
                 <a:solidFill>
                   <a:srgbClr val="0F2040"/>
                 </a:solidFill>
-                <a:latin typeface="Calibri"/>
               </a:rPr>
               <a:t>URL: https://condominios-cyj.vercel.app</a:t>
             </a:r>
@@ -7279,7 +6440,6 @@
                 <a:solidFill>
                   <a:srgbClr val="16A34A"/>
                 </a:solidFill>
-                <a:latin typeface="Calibri"/>
               </a:rPr>
               <a:t>● </a:t>
             </a:r>
@@ -7288,7 +6448,6 @@
                 <a:solidFill>
                   <a:srgbClr val="0F2040"/>
                 </a:solidFill>
-                <a:latin typeface="Calibri"/>
               </a:rPr>
               <a:t>Email: usuario.test@cyj.cl</a:t>
             </a:r>
@@ -7307,7 +6466,6 @@
                 <a:solidFill>
                   <a:srgbClr val="16A34A"/>
                 </a:solidFill>
-                <a:latin typeface="Calibri"/>
               </a:rPr>
               <a:t>● </a:t>
             </a:r>
@@ -7316,7 +6474,6 @@
                 <a:solidFill>
                   <a:srgbClr val="0F2040"/>
                 </a:solidFill>
-                <a:latin typeface="Calibri"/>
               </a:rPr>
               <a:t>Contraseña temporal: Usuario2026!</a:t>
             </a:r>
@@ -7335,7 +6492,6 @@
                 <a:solidFill>
                   <a:srgbClr val="16A34A"/>
                 </a:solidFill>
-                <a:latin typeface="Calibri"/>
               </a:rPr>
               <a:t>● </a:t>
             </a:r>
@@ -7344,37 +6500,8 @@
                 <a:solidFill>
                   <a:srgbClr val="0F2040"/>
                 </a:solidFill>
-                <a:latin typeface="Calibri"/>
               </a:rPr>
               <a:t>Deberás cambiar la contraseña en el primer login</a:t>
-            </a:r>
-          </a:p>
-          <a:p>
-            <a:pPr algn="l">
-              <a:lnSpc>
-                <a:spcPct val="140000"/>
-              </a:lnSpc>
-              <a:spcAft>
-                <a:spcPts val="800"/>
-              </a:spcAft>
-            </a:pPr>
-            <a:r>
-              <a:rPr sz="1600" b="1">
-                <a:solidFill>
-                  <a:srgbClr val="16A34A"/>
-                </a:solidFill>
-                <a:latin typeface="Calibri"/>
-              </a:rPr>
-              <a:t>● </a:t>
-            </a:r>
-            <a:r>
-              <a:rPr sz="1600">
-                <a:solidFill>
-                  <a:srgbClr val="0F2040"/>
-                </a:solidFill>
-                <a:latin typeface="Calibri"/>
-              </a:rPr>
-              <a:t>Página de inicio: /sistema (dashboard)</a:t>
             </a:r>
           </a:p>
         </p:txBody>
